--- a/presentation/presentation_marp.pptx
+++ b/presentation/presentation_marp.pptx
@@ -1304,8 +1304,8 @@
         </p:blipFill>
         <p:spPr>
           <a:xfrm>
-            <a:off x="1809720" y="1428840"/>
-            <a:ext cx="8572320" cy="5114520"/>
+            <a:off x="401834" y="122553"/>
+            <a:ext cx="10962852" cy="6540788"/>
           </a:xfrm>
           <a:prstGeom prst="rect">
             <a:avLst/>
@@ -1316,102 +1316,6 @@
           </a:ln>
         </p:spPr>
       </p:pic>
-      <p:sp>
-        <p:nvSpPr>
-          <p:cNvPr id="131" name="TextBox 130"/>
-          <p:cNvSpPr txBox="1"/>
-          <p:nvPr/>
-        </p:nvSpPr>
-        <p:spPr>
-          <a:xfrm>
-            <a:off x="747720" y="728640"/>
-            <a:ext cx="7621920" cy="484920"/>
-          </a:xfrm>
-          <a:prstGeom prst="rect">
-            <a:avLst/>
-          </a:prstGeom>
-          <a:noFill/>
-          <a:ln w="0">
-            <a:noFill/>
-          </a:ln>
-        </p:spPr>
-        <p:txBody>
-          <a:bodyPr wrap="none" lIns="0" tIns="0" rIns="0" bIns="0" anchor="t">
-            <a:spAutoFit/>
-          </a:bodyPr>
-          <a:lstStyle/>
-          <a:p>
-            <a:r>
-              <a:rPr lang="en-US" sz="2700" b="1" u="none" strike="noStrike">
-                <a:solidFill>
-                  <a:srgbClr val="990000"/>
-                </a:solidFill>
-                <a:effectLst/>
-                <a:uFillTx/>
-                <a:latin typeface=".SFNS-Regular_wdth_opsz240000_GRAD_wght2580000"/>
-                <a:ea typeface=".SFNS-Regular_wdth_opsz240000_GRAD_wght2580000"/>
-              </a:rPr>
-              <a:t>Human vs. LLM Performance (continued)</a:t>
-            </a:r>
-            <a:endParaRPr lang="en-US" sz="2700" b="0" u="none" strike="noStrike">
-              <a:solidFill>
-                <a:srgbClr val="000000"/>
-              </a:solidFill>
-              <a:effectLst/>
-              <a:uFillTx/>
-              <a:latin typeface="Times New Roman"/>
-            </a:endParaRPr>
-          </a:p>
-        </p:txBody>
-      </p:sp>
-      <p:sp>
-        <p:nvSpPr>
-          <p:cNvPr id="132" name="TextBox 131"/>
-          <p:cNvSpPr txBox="1"/>
-          <p:nvPr/>
-        </p:nvSpPr>
-        <p:spPr>
-          <a:xfrm>
-            <a:off x="285840" y="6408000"/>
-            <a:ext cx="6192720" cy="228960"/>
-          </a:xfrm>
-          <a:prstGeom prst="rect">
-            <a:avLst/>
-          </a:prstGeom>
-          <a:noFill/>
-          <a:ln w="0">
-            <a:noFill/>
-          </a:ln>
-        </p:spPr>
-        <p:txBody>
-          <a:bodyPr wrap="none" lIns="0" tIns="0" rIns="0" bIns="0" anchor="t">
-            <a:spAutoFit/>
-          </a:bodyPr>
-          <a:lstStyle/>
-          <a:p>
-            <a:r>
-              <a:rPr lang="en-US" sz="1350" b="0" u="none" strike="noStrike">
-                <a:solidFill>
-                  <a:srgbClr val="666666"/>
-                </a:solidFill>
-                <a:effectLst/>
-                <a:uFillTx/>
-                <a:latin typeface=".SFNS-Regular_wdth_opsz120000_GRAD_wght"/>
-                <a:ea typeface=".SFNS-Regular_wdth_opsz120000_GRAD_wght"/>
-              </a:rPr>
-              <a:t>Can LLMs Replace Human Grant Reviewers? | SBU School of Health Professions</a:t>
-            </a:r>
-            <a:endParaRPr lang="en-US" sz="1350" b="0" u="none" strike="noStrike">
-              <a:solidFill>
-                <a:srgbClr val="000000"/>
-              </a:solidFill>
-              <a:effectLst/>
-              <a:uFillTx/>
-              <a:latin typeface="Times New Roman"/>
-            </a:endParaRPr>
-          </a:p>
-        </p:txBody>
-      </p:sp>
       <p:sp>
         <p:nvSpPr>
           <p:cNvPr id="133" name="TextBox 132"/>
@@ -11312,8 +11216,8 @@
         </p:blipFill>
         <p:spPr>
           <a:xfrm>
-            <a:off x="2069381" y="122760"/>
-            <a:ext cx="7619760" cy="6162480"/>
+            <a:off x="1793608" y="0"/>
+            <a:ext cx="8366391" cy="6766318"/>
           </a:xfrm>
           <a:prstGeom prst="rect">
             <a:avLst/>
@@ -11324,54 +11228,6 @@
           </a:ln>
         </p:spPr>
       </p:pic>
-      <p:sp>
-        <p:nvSpPr>
-          <p:cNvPr id="306" name="TextBox 305"/>
-          <p:cNvSpPr txBox="1"/>
-          <p:nvPr/>
-        </p:nvSpPr>
-        <p:spPr>
-          <a:xfrm>
-            <a:off x="285840" y="6408000"/>
-            <a:ext cx="6192720" cy="228960"/>
-          </a:xfrm>
-          <a:prstGeom prst="rect">
-            <a:avLst/>
-          </a:prstGeom>
-          <a:noFill/>
-          <a:ln w="0">
-            <a:noFill/>
-          </a:ln>
-        </p:spPr>
-        <p:txBody>
-          <a:bodyPr wrap="none" lIns="0" tIns="0" rIns="0" bIns="0" anchor="t">
-            <a:spAutoFit/>
-          </a:bodyPr>
-          <a:lstStyle/>
-          <a:p>
-            <a:r>
-              <a:rPr lang="en-US" sz="1350" b="0" u="none" strike="noStrike">
-                <a:solidFill>
-                  <a:srgbClr val="666666"/>
-                </a:solidFill>
-                <a:effectLst/>
-                <a:uFillTx/>
-                <a:latin typeface=".SFNS-Regular_wdth_opsz120000_GRAD_wght"/>
-                <a:ea typeface=".SFNS-Regular_wdth_opsz120000_GRAD_wght"/>
-              </a:rPr>
-              <a:t>Can LLMs Replace Human Grant Reviewers? | SBU School of Health Professions</a:t>
-            </a:r>
-            <a:endParaRPr lang="en-US" sz="1350" b="0" u="none" strike="noStrike">
-              <a:solidFill>
-                <a:srgbClr val="000000"/>
-              </a:solidFill>
-              <a:effectLst/>
-              <a:uFillTx/>
-              <a:latin typeface="Times New Roman"/>
-            </a:endParaRPr>
-          </a:p>
-        </p:txBody>
-      </p:sp>
       <p:sp>
         <p:nvSpPr>
           <p:cNvPr id="307" name="TextBox 306"/>
@@ -17589,7 +17445,7 @@
           <a:lstStyle/>
           <a:p>
             <a:r>
-              <a:rPr lang="en-US" sz="1350" b="0" u="none" strike="noStrike">
+              <a:rPr lang="en-US" sz="1350" b="0" u="none" strike="noStrike" dirty="0">
                 <a:solidFill>
                   <a:srgbClr val="666666"/>
                 </a:solidFill>
@@ -17600,7 +17456,7 @@
               </a:rPr>
               <a:t>Can LLMs Replace Human Grant Reviewers? | SBU School of Health Professions</a:t>
             </a:r>
-            <a:endParaRPr lang="en-US" sz="1350" b="0" u="none" strike="noStrike">
+            <a:endParaRPr lang="en-US" sz="1350" b="0" u="none" strike="noStrike" dirty="0">
               <a:solidFill>
                 <a:srgbClr val="000000"/>
               </a:solidFill>
@@ -17696,8 +17552,8 @@
         </p:blipFill>
         <p:spPr>
           <a:xfrm>
-            <a:off x="1809720" y="1428840"/>
-            <a:ext cx="8571960" cy="4971600"/>
+            <a:off x="445376" y="237879"/>
+            <a:ext cx="11028857" cy="6396561"/>
           </a:xfrm>
           <a:prstGeom prst="rect">
             <a:avLst/>
@@ -17708,102 +17564,6 @@
           </a:ln>
         </p:spPr>
       </p:pic>
-      <p:sp>
-        <p:nvSpPr>
-          <p:cNvPr id="417" name="TextBox 416"/>
-          <p:cNvSpPr txBox="1"/>
-          <p:nvPr/>
-        </p:nvSpPr>
-        <p:spPr>
-          <a:xfrm>
-            <a:off x="747720" y="728640"/>
-            <a:ext cx="7374240" cy="484920"/>
-          </a:xfrm>
-          <a:prstGeom prst="rect">
-            <a:avLst/>
-          </a:prstGeom>
-          <a:noFill/>
-          <a:ln w="0">
-            <a:noFill/>
-          </a:ln>
-        </p:spPr>
-        <p:txBody>
-          <a:bodyPr wrap="none" lIns="0" tIns="0" rIns="0" bIns="0" anchor="t">
-            <a:spAutoFit/>
-          </a:bodyPr>
-          <a:lstStyle/>
-          <a:p>
-            <a:r>
-              <a:rPr lang="en-US" sz="2700" b="1" u="none" strike="noStrike">
-                <a:solidFill>
-                  <a:srgbClr val="990000"/>
-                </a:solidFill>
-                <a:effectLst/>
-                <a:uFillTx/>
-                <a:latin typeface=".SFNS-Regular_wdth_opsz240000_GRAD_wght2580000"/>
-                <a:ea typeface=".SFNS-Regular_wdth_opsz240000_GRAD_wght2580000"/>
-              </a:rPr>
-              <a:t>Prompt Engineering Impact (continued)</a:t>
-            </a:r>
-            <a:endParaRPr lang="en-US" sz="2700" b="0" u="none" strike="noStrike">
-              <a:solidFill>
-                <a:srgbClr val="000000"/>
-              </a:solidFill>
-              <a:effectLst/>
-              <a:uFillTx/>
-              <a:latin typeface="Times New Roman"/>
-            </a:endParaRPr>
-          </a:p>
-        </p:txBody>
-      </p:sp>
-      <p:sp>
-        <p:nvSpPr>
-          <p:cNvPr id="418" name="TextBox 417"/>
-          <p:cNvSpPr txBox="1"/>
-          <p:nvPr/>
-        </p:nvSpPr>
-        <p:spPr>
-          <a:xfrm>
-            <a:off x="285840" y="6408000"/>
-            <a:ext cx="6192720" cy="228960"/>
-          </a:xfrm>
-          <a:prstGeom prst="rect">
-            <a:avLst/>
-          </a:prstGeom>
-          <a:noFill/>
-          <a:ln w="0">
-            <a:noFill/>
-          </a:ln>
-        </p:spPr>
-        <p:txBody>
-          <a:bodyPr wrap="none" lIns="0" tIns="0" rIns="0" bIns="0" anchor="t">
-            <a:spAutoFit/>
-          </a:bodyPr>
-          <a:lstStyle/>
-          <a:p>
-            <a:r>
-              <a:rPr lang="en-US" sz="1350" b="0" u="none" strike="noStrike">
-                <a:solidFill>
-                  <a:srgbClr val="666666"/>
-                </a:solidFill>
-                <a:effectLst/>
-                <a:uFillTx/>
-                <a:latin typeface=".SFNS-Regular_wdth_opsz120000_GRAD_wght"/>
-                <a:ea typeface=".SFNS-Regular_wdth_opsz120000_GRAD_wght"/>
-              </a:rPr>
-              <a:t>Can LLMs Replace Human Grant Reviewers? | SBU School of Health Professions</a:t>
-            </a:r>
-            <a:endParaRPr lang="en-US" sz="1350" b="0" u="none" strike="noStrike">
-              <a:solidFill>
-                <a:srgbClr val="000000"/>
-              </a:solidFill>
-              <a:effectLst/>
-              <a:uFillTx/>
-              <a:latin typeface="Times New Roman"/>
-            </a:endParaRPr>
-          </a:p>
-        </p:txBody>
-      </p:sp>
       <p:sp>
         <p:nvSpPr>
           <p:cNvPr id="419" name="TextBox 418"/>
@@ -24164,8 +23924,8 @@
         </p:blipFill>
         <p:spPr>
           <a:xfrm>
-            <a:off x="1809720" y="1647720"/>
-            <a:ext cx="8571960" cy="4247640"/>
+            <a:off x="300124" y="397433"/>
+            <a:ext cx="11591751" cy="5744029"/>
           </a:xfrm>
           <a:prstGeom prst="rect">
             <a:avLst/>
@@ -24176,102 +23936,6 @@
           </a:ln>
         </p:spPr>
       </p:pic>
-      <p:sp>
-        <p:nvSpPr>
-          <p:cNvPr id="530" name="TextBox 529"/>
-          <p:cNvSpPr txBox="1"/>
-          <p:nvPr/>
-        </p:nvSpPr>
-        <p:spPr>
-          <a:xfrm>
-            <a:off x="747720" y="938520"/>
-            <a:ext cx="5888160" cy="484920"/>
-          </a:xfrm>
-          <a:prstGeom prst="rect">
-            <a:avLst/>
-          </a:prstGeom>
-          <a:noFill/>
-          <a:ln w="0">
-            <a:noFill/>
-          </a:ln>
-        </p:spPr>
-        <p:txBody>
-          <a:bodyPr wrap="none" lIns="0" tIns="0" rIns="0" bIns="0" anchor="t">
-            <a:spAutoFit/>
-          </a:bodyPr>
-          <a:lstStyle/>
-          <a:p>
-            <a:r>
-              <a:rPr lang="en-US" sz="2700" b="1" u="none" strike="noStrike">
-                <a:solidFill>
-                  <a:srgbClr val="990000"/>
-                </a:solidFill>
-                <a:effectLst/>
-                <a:uFillTx/>
-                <a:latin typeface=".SFNS-Regular_wdth_opsz240000_GRAD_wght2580000"/>
-                <a:ea typeface=".SFNS-Regular_wdth_opsz240000_GRAD_wght2580000"/>
-              </a:rPr>
-              <a:t>Model Performance (continued)</a:t>
-            </a:r>
-            <a:endParaRPr lang="en-US" sz="2700" b="0" u="none" strike="noStrike">
-              <a:solidFill>
-                <a:srgbClr val="000000"/>
-              </a:solidFill>
-              <a:effectLst/>
-              <a:uFillTx/>
-              <a:latin typeface="Times New Roman"/>
-            </a:endParaRPr>
-          </a:p>
-        </p:txBody>
-      </p:sp>
-      <p:sp>
-        <p:nvSpPr>
-          <p:cNvPr id="531" name="TextBox 530"/>
-          <p:cNvSpPr txBox="1"/>
-          <p:nvPr/>
-        </p:nvSpPr>
-        <p:spPr>
-          <a:xfrm>
-            <a:off x="285840" y="6408000"/>
-            <a:ext cx="6192720" cy="228960"/>
-          </a:xfrm>
-          <a:prstGeom prst="rect">
-            <a:avLst/>
-          </a:prstGeom>
-          <a:noFill/>
-          <a:ln w="0">
-            <a:noFill/>
-          </a:ln>
-        </p:spPr>
-        <p:txBody>
-          <a:bodyPr wrap="none" lIns="0" tIns="0" rIns="0" bIns="0" anchor="t">
-            <a:spAutoFit/>
-          </a:bodyPr>
-          <a:lstStyle/>
-          <a:p>
-            <a:r>
-              <a:rPr lang="en-US" sz="1350" b="0" u="none" strike="noStrike">
-                <a:solidFill>
-                  <a:srgbClr val="666666"/>
-                </a:solidFill>
-                <a:effectLst/>
-                <a:uFillTx/>
-                <a:latin typeface=".SFNS-Regular_wdth_opsz120000_GRAD_wght"/>
-                <a:ea typeface=".SFNS-Regular_wdth_opsz120000_GRAD_wght"/>
-              </a:rPr>
-              <a:t>Can LLMs Replace Human Grant Reviewers? | SBU School of Health Professions</a:t>
-            </a:r>
-            <a:endParaRPr lang="en-US" sz="1350" b="0" u="none" strike="noStrike">
-              <a:solidFill>
-                <a:srgbClr val="000000"/>
-              </a:solidFill>
-              <a:effectLst/>
-              <a:uFillTx/>
-              <a:latin typeface="Times New Roman"/>
-            </a:endParaRPr>
-          </a:p>
-        </p:txBody>
-      </p:sp>
       <p:sp>
         <p:nvSpPr>
           <p:cNvPr id="532" name="TextBox 531"/>
@@ -25774,54 +25438,6 @@
           <a:chExt cx="0" cy="0"/>
         </a:xfrm>
       </p:grpSpPr>
-      <p:sp>
-        <p:nvSpPr>
-          <p:cNvPr id="558" name="TextBox 557"/>
-          <p:cNvSpPr txBox="1"/>
-          <p:nvPr/>
-        </p:nvSpPr>
-        <p:spPr>
-          <a:xfrm>
-            <a:off x="747720" y="747720"/>
-            <a:ext cx="6287040" cy="484920"/>
-          </a:xfrm>
-          <a:prstGeom prst="rect">
-            <a:avLst/>
-          </a:prstGeom>
-          <a:noFill/>
-          <a:ln w="0">
-            <a:noFill/>
-          </a:ln>
-        </p:spPr>
-        <p:txBody>
-          <a:bodyPr wrap="none" lIns="0" tIns="0" rIns="0" bIns="0" anchor="t">
-            <a:spAutoFit/>
-          </a:bodyPr>
-          <a:lstStyle/>
-          <a:p>
-            <a:r>
-              <a:rPr lang="en-US" sz="2700" b="1" u="none" strike="noStrike">
-                <a:solidFill>
-                  <a:srgbClr val="990000"/>
-                </a:solidFill>
-                <a:effectLst/>
-                <a:uFillTx/>
-                <a:latin typeface=".SFNS-Regular_wdth_opsz240000_GRAD_wght2580000"/>
-                <a:ea typeface=".SFNS-Regular_wdth_opsz240000_GRAD_wght2580000"/>
-              </a:rPr>
-              <a:t>Inter-Rater Reliability (continued)</a:t>
-            </a:r>
-            <a:endParaRPr lang="en-US" sz="2700" b="0" u="none" strike="noStrike">
-              <a:solidFill>
-                <a:srgbClr val="000000"/>
-              </a:solidFill>
-              <a:effectLst/>
-              <a:uFillTx/>
-              <a:latin typeface="Times New Roman"/>
-            </a:endParaRPr>
-          </a:p>
-        </p:txBody>
-      </p:sp>
       <p:pic>
         <p:nvPicPr>
           <p:cNvPr id="559" name="Picture 558"/>
@@ -25834,8 +25450,8 @@
         </p:blipFill>
         <p:spPr>
           <a:xfrm>
-            <a:off x="1809720" y="1952640"/>
-            <a:ext cx="8571960" cy="3638160"/>
+            <a:off x="157012" y="893097"/>
+            <a:ext cx="11761508" cy="4991886"/>
           </a:xfrm>
           <a:prstGeom prst="rect">
             <a:avLst/>
@@ -25854,7 +25470,7 @@
         </p:nvSpPr>
         <p:spPr>
           <a:xfrm>
-            <a:off x="747720" y="1470240"/>
+            <a:off x="109091" y="123480"/>
             <a:ext cx="8786160" cy="322200"/>
           </a:xfrm>
           <a:prstGeom prst="rect">
@@ -25914,7 +25530,7 @@
         </p:nvSpPr>
         <p:spPr>
           <a:xfrm>
-            <a:off x="747720" y="5793840"/>
+            <a:off x="109091" y="6481080"/>
             <a:ext cx="5467680" cy="253440"/>
           </a:xfrm>
           <a:prstGeom prst="rect">
@@ -25932,7 +25548,7 @@
           <a:lstStyle/>
           <a:p>
             <a:r>
-              <a:rPr lang="en-US" sz="1800" b="0" i="1" u="none" strike="noStrike">
+              <a:rPr lang="en-US" sz="1800" b="0" i="1" u="none" strike="noStrike" dirty="0">
                 <a:solidFill>
                   <a:srgbClr val="1F2328"/>
                 </a:solidFill>
@@ -25943,55 +25559,7 @@
               </a:rPr>
               <a:t>Note: Applicants anonymized as S1-S3 to maintain blinding</a:t>
             </a:r>
-            <a:endParaRPr lang="en-US" sz="1800" b="0" u="none" strike="noStrike">
-              <a:solidFill>
-                <a:srgbClr val="000000"/>
-              </a:solidFill>
-              <a:effectLst/>
-              <a:uFillTx/>
-              <a:latin typeface="Times New Roman"/>
-            </a:endParaRPr>
-          </a:p>
-        </p:txBody>
-      </p:sp>
-      <p:sp>
-        <p:nvSpPr>
-          <p:cNvPr id="562" name="TextBox 561"/>
-          <p:cNvSpPr txBox="1"/>
-          <p:nvPr/>
-        </p:nvSpPr>
-        <p:spPr>
-          <a:xfrm>
-            <a:off x="285840" y="6408000"/>
-            <a:ext cx="6192720" cy="228960"/>
-          </a:xfrm>
-          <a:prstGeom prst="rect">
-            <a:avLst/>
-          </a:prstGeom>
-          <a:noFill/>
-          <a:ln w="0">
-            <a:noFill/>
-          </a:ln>
-        </p:spPr>
-        <p:txBody>
-          <a:bodyPr wrap="none" lIns="0" tIns="0" rIns="0" bIns="0" anchor="t">
-            <a:spAutoFit/>
-          </a:bodyPr>
-          <a:lstStyle/>
-          <a:p>
-            <a:r>
-              <a:rPr lang="en-US" sz="1350" b="0" u="none" strike="noStrike">
-                <a:solidFill>
-                  <a:srgbClr val="666666"/>
-                </a:solidFill>
-                <a:effectLst/>
-                <a:uFillTx/>
-                <a:latin typeface=".SFNS-Regular_wdth_opsz120000_GRAD_wght"/>
-                <a:ea typeface=".SFNS-Regular_wdth_opsz120000_GRAD_wght"/>
-              </a:rPr>
-              <a:t>Can LLMs Replace Human Grant Reviewers? | SBU School of Health Professions</a:t>
-            </a:r>
-            <a:endParaRPr lang="en-US" sz="1350" b="0" u="none" strike="noStrike">
+            <a:endParaRPr lang="en-US" sz="1800" b="0" u="none" strike="noStrike" dirty="0">
               <a:solidFill>
                 <a:srgbClr val="000000"/>
               </a:solidFill>
@@ -33015,7 +32583,7 @@
         <p:spPr>
           <a:xfrm>
             <a:off x="1204920" y="4603680"/>
-            <a:ext cx="4196520" cy="322200"/>
+            <a:ext cx="3718775" cy="276999"/>
           </a:xfrm>
           <a:prstGeom prst="rect">
             <a:avLst/>
@@ -33032,7 +32600,7 @@
           <a:lstStyle/>
           <a:p>
             <a:r>
-              <a:rPr lang="en-US" sz="1800" b="1" u="none" strike="noStrike">
+              <a:rPr lang="en-US" sz="1800" b="1" u="none" strike="noStrike" dirty="0">
                 <a:solidFill>
                   <a:srgbClr val="1F2328"/>
                 </a:solidFill>
@@ -33044,7 +32612,7 @@
               <a:t>Email: </a:t>
             </a:r>
             <a:r>
-              <a:rPr lang="en-US" sz="1800" b="0" u="none" strike="noStrike">
+              <a:rPr lang="en-US" sz="1800" b="0" u="none" strike="noStrike" dirty="0" err="1">
                 <a:solidFill>
                   <a:srgbClr val="1F2328"/>
                 </a:solidFill>
@@ -33053,9 +32621,9 @@
                 <a:latin typeface=".SFNS-Regular_wdth_opsz180000_GRAD_wght"/>
                 <a:ea typeface=".SFNS-Regular_wdth_opsz180000_GRAD_wght"/>
               </a:rPr>
-              <a:t>[hants.williams@stonybrook.edu]</a:t>
+              <a:t>hants.williams@stonybrook.edu</a:t>
             </a:r>
-            <a:endParaRPr lang="en-US" sz="1800" b="0" u="none" strike="noStrike">
+            <a:endParaRPr lang="en-US" sz="1800" b="0" u="none" strike="noStrike" dirty="0">
               <a:solidFill>
                 <a:srgbClr val="000000"/>
               </a:solidFill>
@@ -37835,7 +37403,7 @@
         <p:spPr>
           <a:xfrm>
             <a:off x="1204920" y="2394000"/>
-            <a:ext cx="10596960" cy="322200"/>
+            <a:ext cx="9148915" cy="276999"/>
           </a:xfrm>
           <a:prstGeom prst="rect">
             <a:avLst/>
@@ -37852,7 +37420,7 @@
           <a:lstStyle/>
           <a:p>
             <a:r>
-              <a:rPr lang="en-US" sz="1800" b="1" u="none" strike="noStrike">
+              <a:rPr lang="en-US" sz="1800" u="none" strike="noStrike" dirty="0">
                 <a:solidFill>
                   <a:srgbClr val="1F2328"/>
                 </a:solidFill>
@@ -37864,7 +37432,7 @@
               <a:t>4 grant applications </a:t>
             </a:r>
             <a:r>
-              <a:rPr lang="en-US" sz="1800" b="0" u="none" strike="noStrike">
+              <a:rPr lang="en-US" sz="1800" u="none" strike="noStrike" dirty="0">
                 <a:solidFill>
                   <a:srgbClr val="1F2328"/>
                 </a:solidFill>
@@ -37873,9 +37441,21 @@
                 <a:latin typeface=".SFNS-Regular_wdth_opsz180000_GRAD_wght"/>
                 <a:ea typeface=".SFNS-Regular_wdth_opsz180000_GRAD_wght"/>
               </a:rPr>
-              <a:t>originally submitted to SBU School of Health Professions Research Seed Grant</a:t>
+              <a:t>originally </a:t>
             </a:r>
-            <a:endParaRPr lang="en-US" sz="1800" b="0" u="none" strike="noStrike">
+            <a:r>
+              <a:rPr lang="en-US" sz="1800" b="0" u="none" strike="noStrike" dirty="0">
+                <a:solidFill>
+                  <a:srgbClr val="1F2328"/>
+                </a:solidFill>
+                <a:effectLst/>
+                <a:uFillTx/>
+                <a:latin typeface=".SFNS-Regular_wdth_opsz180000_GRAD_wght"/>
+                <a:ea typeface=".SFNS-Regular_wdth_opsz180000_GRAD_wght"/>
+              </a:rPr>
+              <a:t>submitted to SBU School of Health Professions Research Seed Grant</a:t>
+            </a:r>
+            <a:endParaRPr lang="en-US" sz="1800" b="0" u="none" strike="noStrike" dirty="0">
               <a:solidFill>
                 <a:srgbClr val="000000"/>
               </a:solidFill>
@@ -38203,7 +37783,7 @@
         <p:spPr>
           <a:xfrm>
             <a:off x="1204920" y="3137040"/>
-            <a:ext cx="8334720" cy="322200"/>
+            <a:ext cx="7229480" cy="276999"/>
           </a:xfrm>
           <a:prstGeom prst="rect">
             <a:avLst/>
@@ -38220,7 +37800,7 @@
           <a:lstStyle/>
           <a:p>
             <a:r>
-              <a:rPr lang="en-US" sz="1800" b="1" u="none" strike="noStrike">
+              <a:rPr lang="en-US" sz="1800" u="none" strike="noStrike" dirty="0">
                 <a:solidFill>
                   <a:srgbClr val="1F2328"/>
                 </a:solidFill>
@@ -38232,7 +37812,7 @@
               <a:t>1 applicant excluded </a:t>
             </a:r>
             <a:r>
-              <a:rPr lang="en-US" sz="1800" b="0" u="none" strike="noStrike">
+              <a:rPr lang="en-US" sz="1800" u="none" strike="noStrike" dirty="0">
                 <a:solidFill>
                   <a:srgbClr val="1F2328"/>
                 </a:solidFill>
@@ -38243,7 +37823,7 @@
               </a:rPr>
               <a:t>- withdrew consent for LLM processing (remote or local)</a:t>
             </a:r>
-            <a:endParaRPr lang="en-US" sz="1800" b="0" u="none" strike="noStrike">
+            <a:endParaRPr lang="en-US" sz="1800" u="none" strike="noStrike" dirty="0">
               <a:solidFill>
                 <a:srgbClr val="000000"/>
               </a:solidFill>
@@ -38393,7 +37973,7 @@
         <p:spPr>
           <a:xfrm>
             <a:off x="1204920" y="3537000"/>
-            <a:ext cx="5284800" cy="322200"/>
+            <a:ext cx="4025013" cy="276999"/>
           </a:xfrm>
           <a:prstGeom prst="rect">
             <a:avLst/>
@@ -38410,7 +37990,7 @@
           <a:lstStyle/>
           <a:p>
             <a:r>
-              <a:rPr lang="en-US" sz="1800" b="1" u="none" strike="noStrike">
+              <a:rPr lang="en-US" sz="1800" u="none" strike="noStrike" dirty="0">
                 <a:solidFill>
                   <a:srgbClr val="1F2328"/>
                 </a:solidFill>
@@ -38422,7 +38002,7 @@
               <a:t>Final dataset: 3 grant applications </a:t>
             </a:r>
             <a:r>
-              <a:rPr lang="en-US" sz="1800" b="0" u="none" strike="noStrike">
+              <a:rPr lang="en-US" sz="1800" u="none" strike="noStrike" dirty="0">
                 <a:solidFill>
                   <a:srgbClr val="1F2328"/>
                 </a:solidFill>
@@ -38433,7 +38013,7 @@
               </a:rPr>
               <a:t>analyzed</a:t>
             </a:r>
-            <a:endParaRPr lang="en-US" sz="1800" b="0" u="none" strike="noStrike">
+            <a:endParaRPr lang="en-US" sz="1800" u="none" strike="noStrike" dirty="0">
               <a:solidFill>
                 <a:srgbClr val="000000"/>
               </a:solidFill>
@@ -43706,7 +43286,7 @@
           <a:lstStyle/>
           <a:p>
             <a:r>
-              <a:rPr lang="en-US" sz="1800" b="0" u="none" strike="noStrike">
+              <a:rPr lang="en-US" sz="1800" b="0" u="none" strike="noStrike" dirty="0">
                 <a:solidFill>
                   <a:srgbClr val="1F2328"/>
                 </a:solidFill>
@@ -43718,7 +43298,7 @@
               <a:t>1. </a:t>
             </a:r>
             <a:r>
-              <a:rPr lang="en-US" sz="1800" b="1" u="none" strike="noStrike">
+              <a:rPr lang="en-US" sz="1800" b="1" u="none" strike="noStrike" dirty="0">
                 <a:solidFill>
                   <a:srgbClr val="1F2328"/>
                 </a:solidFill>
@@ -43730,7 +43310,7 @@
               <a:t>baseline_v1 </a:t>
             </a:r>
             <a:r>
-              <a:rPr lang="en-US" sz="1800" b="0" u="none" strike="noStrike">
+              <a:rPr lang="en-US" sz="1800" b="0" u="none" strike="noStrike" dirty="0">
                 <a:solidFill>
                   <a:srgbClr val="1F2328"/>
                 </a:solidFill>
@@ -43741,7 +43321,7 @@
               </a:rPr>
               <a:t>- Standard instructions without examples</a:t>
             </a:r>
-            <a:endParaRPr lang="en-US" sz="1800" b="0" u="none" strike="noStrike">
+            <a:endParaRPr lang="en-US" sz="1800" b="0" u="none" strike="noStrike" dirty="0">
               <a:solidFill>
                 <a:srgbClr val="000000"/>
               </a:solidFill>
